--- a/ogp/mikuscore-ogp.pptx
+++ b/ogp/mikuscore-ogp.pptx
@@ -3835,7 +3835,7 @@
           </p:blipFill>
           <p:spPr>
             <a:xfrm>
-              <a:off x="7439265" y="2307299"/>
+              <a:off x="7738820" y="2307299"/>
               <a:ext cx="3600293" cy="3600293"/>
             </a:xfrm>
             <a:prstGeom prst="rect">
@@ -3882,10 +3882,10 @@
       </p:grpSpPr>
       <p:grpSp>
         <p:nvGrpSpPr>
-          <p:cNvPr id="10" name="グループ化 9">
+          <p:cNvPr id="2" name="グループ化 1">
             <a:extLst>
               <a:ext uri="{FF2B5EF4-FFF2-40B4-BE49-F238E27FC236}">
-                <a16:creationId xmlns:a16="http://schemas.microsoft.com/office/drawing/2014/main" id="{007BA3BB-565A-7985-7EA8-3496288C6301}"/>
+                <a16:creationId xmlns:a16="http://schemas.microsoft.com/office/drawing/2014/main" id="{AA4B4732-B6E8-7998-BE1E-253AD77F39CD}"/>
               </a:ext>
             </a:extLst>
           </p:cNvPr>
@@ -3902,10 +3902,10 @@
         </p:grpSpPr>
         <p:grpSp>
           <p:nvGrpSpPr>
-            <p:cNvPr id="3" name="グループ化 2">
+            <p:cNvPr id="9" name="グループ化 8">
               <a:extLst>
                 <a:ext uri="{FF2B5EF4-FFF2-40B4-BE49-F238E27FC236}">
-                  <a16:creationId xmlns:a16="http://schemas.microsoft.com/office/drawing/2014/main" id="{F496FD6B-0957-0FED-2BE7-62EA267731ED}"/>
+                  <a16:creationId xmlns:a16="http://schemas.microsoft.com/office/drawing/2014/main" id="{F7F20085-8F24-5E20-A255-3ED0D26E35CA}"/>
                 </a:ext>
               </a:extLst>
             </p:cNvPr>
@@ -3922,10 +3922,10 @@
           </p:grpSpPr>
           <p:pic>
             <p:nvPicPr>
-              <p:cNvPr id="7" name="グラフィックス 6">
+              <p:cNvPr id="14" name="グラフィックス 13">
                 <a:extLst>
                   <a:ext uri="{FF2B5EF4-FFF2-40B4-BE49-F238E27FC236}">
-                    <a16:creationId xmlns:a16="http://schemas.microsoft.com/office/drawing/2014/main" id="{4C6D20EC-72EE-CB33-8230-BC63E848F615}"/>
+                    <a16:creationId xmlns:a16="http://schemas.microsoft.com/office/drawing/2014/main" id="{7728FA01-72BD-2E67-E814-3D787A312E36}"/>
                   </a:ext>
                 </a:extLst>
               </p:cNvPr>
@@ -3958,10 +3958,10 @@
           </p:pic>
           <p:pic>
             <p:nvPicPr>
-              <p:cNvPr id="8" name="グラフィックス 7">
+              <p:cNvPr id="15" name="グラフィックス 14">
                 <a:extLst>
                   <a:ext uri="{FF2B5EF4-FFF2-40B4-BE49-F238E27FC236}">
-                    <a16:creationId xmlns:a16="http://schemas.microsoft.com/office/drawing/2014/main" id="{DCFE7A4A-AD4B-098B-D1C0-2B80D18557C8}"/>
+                    <a16:creationId xmlns:a16="http://schemas.microsoft.com/office/drawing/2014/main" id="{0ACCFD39-3DF1-2FCC-42A7-0F9E9361E6CF}"/>
                   </a:ext>
                 </a:extLst>
               </p:cNvPr>
@@ -3995,10 +3995,10 @@
         </p:grpSp>
         <p:pic>
           <p:nvPicPr>
-            <p:cNvPr id="4" name="グラフィックス 3">
+            <p:cNvPr id="11" name="グラフィックス 10">
               <a:extLst>
                 <a:ext uri="{FF2B5EF4-FFF2-40B4-BE49-F238E27FC236}">
-                  <a16:creationId xmlns:a16="http://schemas.microsoft.com/office/drawing/2014/main" id="{78A095A6-2143-0183-70B6-0ED137F1A28B}"/>
+                  <a16:creationId xmlns:a16="http://schemas.microsoft.com/office/drawing/2014/main" id="{236813D8-18B3-A8A5-67EE-D93076F5CAD6}"/>
                 </a:ext>
               </a:extLst>
             </p:cNvPr>
@@ -4031,10 +4031,10 @@
         </p:pic>
         <p:pic>
           <p:nvPicPr>
-            <p:cNvPr id="5" name="グラフィックス 4">
+            <p:cNvPr id="12" name="グラフィックス 11">
               <a:extLst>
                 <a:ext uri="{FF2B5EF4-FFF2-40B4-BE49-F238E27FC236}">
-                  <a16:creationId xmlns:a16="http://schemas.microsoft.com/office/drawing/2014/main" id="{F5BE27F4-7140-7E73-F50B-4AAD255D4CC4}"/>
+                  <a16:creationId xmlns:a16="http://schemas.microsoft.com/office/drawing/2014/main" id="{A627B1B4-273D-20C2-7FA9-B9B0F6AA29EC}"/>
                 </a:ext>
               </a:extLst>
             </p:cNvPr>
@@ -4067,10 +4067,10 @@
         </p:pic>
         <p:pic>
           <p:nvPicPr>
-            <p:cNvPr id="6" name="グラフィックス 5">
+            <p:cNvPr id="13" name="グラフィックス 12">
               <a:extLst>
                 <a:ext uri="{FF2B5EF4-FFF2-40B4-BE49-F238E27FC236}">
-                  <a16:creationId xmlns:a16="http://schemas.microsoft.com/office/drawing/2014/main" id="{97DB4BE2-36D3-B240-91A4-4BB25078ABF0}"/>
+                  <a16:creationId xmlns:a16="http://schemas.microsoft.com/office/drawing/2014/main" id="{DBE7E813-81FD-007B-E84B-96C2092ADC6F}"/>
                 </a:ext>
               </a:extLst>
             </p:cNvPr>
@@ -4093,7 +4093,7 @@
           </p:blipFill>
           <p:spPr>
             <a:xfrm>
-              <a:off x="7439265" y="2307299"/>
+              <a:off x="7738820" y="2307299"/>
               <a:ext cx="3600293" cy="3600293"/>
             </a:xfrm>
             <a:prstGeom prst="rect">
